--- a/assets/figures-editable/c3-c4/c3-e29.pptx
+++ b/assets/figures-editable/c3-c4/c3-e29.pptx
@@ -3104,8 +3104,8 @@
         </p:nvSpPr>
         <p:spPr>
           <a:xfrm>
-            <a:off x="274320" y="137160"/>
-            <a:ext cx="11612880" cy="365760"/>
+            <a:off x="274320" y="118872"/>
+            <a:ext cx="11612880" cy="340105"/>
           </a:xfrm>
           <a:prstGeom prst="rect">
             <a:avLst/>
@@ -3114,7 +3114,7 @@
           <a:effectLst/>
         </p:spPr>
         <p:txBody>
-          <a:bodyPr wrap="square" lIns="27432" rIns="27432" tIns="18288" bIns="18288" anchor="ctr">
+          <a:bodyPr wrap="none" lIns="18288" rIns="18288" tIns="18288" bIns="18288" anchor="t">
             <a:spAutoFit/>
           </a:bodyPr>
           <a:lstStyle/>
@@ -3125,7 +3125,7 @@
               </a:spcAft>
             </a:pPr>
             <a:r>
-              <a:rPr sz="2100" b="0" i="0">
+              <a:rPr sz="1900" b="1" i="0">
                 <a:solidFill>
                   <a:srgbClr val="8EDBD4"/>
                 </a:solidFill>
@@ -3138,22 +3138,642 @@
       </p:sp>
       <p:sp>
         <p:nvSpPr>
-          <p:cNvPr id="3" name="C3-E29 rect 1" descr="sci-ppt:o001"/>
+          <p:cNvPr id="3" name="C3-E29 text 1" descr="sci-ppt:o001"/>
+          <p:cNvSpPr txBox="1"/>
+          <p:nvPr/>
+        </p:nvSpPr>
+        <p:spPr>
+          <a:xfrm>
+            <a:off x="457200" y="914400"/>
+            <a:ext cx="11338560" cy="262636"/>
+          </a:xfrm>
+          <a:prstGeom prst="rect">
+            <a:avLst/>
+          </a:prstGeom>
+          <a:noFill/>
+          <a:effectLst/>
+        </p:spPr>
+        <p:txBody>
+          <a:bodyPr wrap="none" lIns="18288" rIns="18288" tIns="18288" bIns="18288" anchor="t">
+            <a:spAutoFit/>
+          </a:bodyPr>
+          <a:lstStyle/>
+          <a:p>
+            <a:pPr algn="l">
+              <a:spcAft>
+                <a:spcPts val="0"/>
+              </a:spcAft>
+            </a:pPr>
+            <a:r>
+              <a:rPr sz="1400" b="1" i="0">
+                <a:solidFill>
+                  <a:srgbClr val="8EDBD4"/>
+                </a:solidFill>
+                <a:latin typeface="Arial"/>
+              </a:rPr>
+              <a:t>From 25 µJ of laser light to 2 nJ of jet kinetic energy (nJ, log axis)</a:t>
+            </a:r>
+          </a:p>
+        </p:txBody>
+      </p:sp>
+      <p:sp>
+        <p:nvSpPr>
+          <p:cNvPr id="4" name="C3-E29 text 2" descr="sci-ppt:o002"/>
+          <p:cNvSpPr txBox="1"/>
+          <p:nvPr/>
+        </p:nvSpPr>
+        <p:spPr>
+          <a:xfrm>
+            <a:off x="457200" y="1481328"/>
+            <a:ext cx="5029200" cy="239395"/>
+          </a:xfrm>
+          <a:prstGeom prst="rect">
+            <a:avLst/>
+          </a:prstGeom>
+          <a:noFill/>
+          <a:effectLst/>
+        </p:spPr>
+        <p:txBody>
+          <a:bodyPr wrap="none" lIns="18288" rIns="18288" tIns="18288" bIns="18288" anchor="t">
+            <a:spAutoFit/>
+          </a:bodyPr>
+          <a:lstStyle/>
+          <a:p>
+            <a:pPr algn="l">
+              <a:spcAft>
+                <a:spcPts val="0"/>
+              </a:spcAft>
+            </a:pPr>
+            <a:r>
+              <a:rPr sz="1250" b="0" i="0">
+                <a:solidFill>
+                  <a:srgbClr val="E7F0F3"/>
+                </a:solidFill>
+                <a:latin typeface="Arial"/>
+              </a:rPr>
+              <a:t>incident laser energy E_L</a:t>
+            </a:r>
+          </a:p>
+        </p:txBody>
+      </p:sp>
+      <p:sp>
+        <p:nvSpPr>
+          <p:cNvPr id="5" name="C3-E29 rect 3" descr="sci-ppt:o003"/>
           <p:cNvSpPr/>
           <p:nvPr/>
         </p:nvSpPr>
         <p:spPr>
           <a:xfrm>
-            <a:off x="594360" y="1417320"/>
-            <a:ext cx="3200400" cy="1325880"/>
+            <a:off x="5577840" y="1463040"/>
+            <a:ext cx="4850432" cy="411480"/>
           </a:xfrm>
           <a:prstGeom prst="rect">
+            <a:avLst/>
+          </a:prstGeom>
+          <a:solidFill>
+            <a:srgbClr val="8EDBD4">
+              <a:alpha val="85000"/>
+            </a:srgbClr>
+          </a:solidFill>
+          <a:ln w="12700">
+            <a:solidFill>
+              <a:srgbClr val="8EDBD4">
+                <a:alpha val="85000"/>
+              </a:srgbClr>
+            </a:solidFill>
+          </a:ln>
+          <a:effectLst/>
+        </p:spPr>
+        <p:txBody>
+          <a:bodyPr rtlCol="0" anchor="ctr"/>
+          <a:lstStyle/>
+          <a:p>
+            <a:pPr algn="ctr"/>
+          </a:p>
+        </p:txBody>
+      </p:sp>
+      <p:sp>
+        <p:nvSpPr>
+          <p:cNvPr id="6" name="C3-E29 text 4" descr="sci-ppt:o004"/>
+          <p:cNvSpPr txBox="1"/>
+          <p:nvPr/>
+        </p:nvSpPr>
+        <p:spPr>
+          <a:xfrm>
+            <a:off x="10501424" y="1508760"/>
+            <a:ext cx="1371600" cy="239395"/>
+          </a:xfrm>
+          <a:prstGeom prst="rect">
+            <a:avLst/>
+          </a:prstGeom>
+          <a:noFill/>
+          <a:effectLst/>
+        </p:spPr>
+        <p:txBody>
+          <a:bodyPr wrap="none" lIns="18288" rIns="18288" tIns="18288" bIns="18288" anchor="t">
+            <a:spAutoFit/>
+          </a:bodyPr>
+          <a:lstStyle/>
+          <a:p>
+            <a:pPr algn="l">
+              <a:spcAft>
+                <a:spcPts val="0"/>
+              </a:spcAft>
+            </a:pPr>
+            <a:r>
+              <a:rPr sz="1250" b="1" i="0">
+                <a:solidFill>
+                  <a:srgbClr val="E7F0F3"/>
+                </a:solidFill>
+                <a:latin typeface="Arial"/>
+              </a:rPr>
+              <a:t>25000 nJ</a:t>
+            </a:r>
+          </a:p>
+        </p:txBody>
+      </p:sp>
+      <p:sp>
+        <p:nvSpPr>
+          <p:cNvPr id="7" name="C3-E29 text 5" descr="sci-ppt:o005"/>
+          <p:cNvSpPr txBox="1"/>
+          <p:nvPr/>
+        </p:nvSpPr>
+        <p:spPr>
+          <a:xfrm>
+            <a:off x="457200" y="2121408"/>
+            <a:ext cx="5029200" cy="239395"/>
+          </a:xfrm>
+          <a:prstGeom prst="rect">
+            <a:avLst/>
+          </a:prstGeom>
+          <a:noFill/>
+          <a:effectLst/>
+        </p:spPr>
+        <p:txBody>
+          <a:bodyPr wrap="none" lIns="18288" rIns="18288" tIns="18288" bIns="18288" anchor="t">
+            <a:spAutoFit/>
+          </a:bodyPr>
+          <a:lstStyle/>
+          <a:p>
+            <a:pPr algn="l">
+              <a:spcAft>
+                <a:spcPts val="0"/>
+              </a:spcAft>
+            </a:pPr>
+            <a:r>
+              <a:rPr sz="1250" b="0" i="0">
+                <a:solidFill>
+                  <a:srgbClr val="E7F0F3"/>
+                </a:solidFill>
+                <a:latin typeface="Arial"/>
+              </a:rPr>
+              <a:t>absorbed E_abs,tot = 0.8 × 0.5 × E_L</a:t>
+            </a:r>
+          </a:p>
+        </p:txBody>
+      </p:sp>
+      <p:sp>
+        <p:nvSpPr>
+          <p:cNvPr id="8" name="C3-E29 rect 6" descr="sci-ppt:o006"/>
+          <p:cNvSpPr/>
+          <p:nvPr/>
+        </p:nvSpPr>
+        <p:spPr>
+          <a:xfrm>
+            <a:off x="5577840" y="2103120"/>
+            <a:ext cx="4411549" cy="411480"/>
+          </a:xfrm>
+          <a:prstGeom prst="rect">
+            <a:avLst/>
+          </a:prstGeom>
+          <a:solidFill>
+            <a:srgbClr val="7FC8F8">
+              <a:alpha val="85000"/>
+            </a:srgbClr>
+          </a:solidFill>
+          <a:ln w="12700">
+            <a:solidFill>
+              <a:srgbClr val="7FC8F8">
+                <a:alpha val="85000"/>
+              </a:srgbClr>
+            </a:solidFill>
+          </a:ln>
+          <a:effectLst/>
+        </p:spPr>
+        <p:txBody>
+          <a:bodyPr rtlCol="0" anchor="ctr"/>
+          <a:lstStyle/>
+          <a:p>
+            <a:pPr algn="ctr"/>
+          </a:p>
+        </p:txBody>
+      </p:sp>
+      <p:sp>
+        <p:nvSpPr>
+          <p:cNvPr id="9" name="C3-E29 text 7" descr="sci-ppt:o007"/>
+          <p:cNvSpPr txBox="1"/>
+          <p:nvPr/>
+        </p:nvSpPr>
+        <p:spPr>
+          <a:xfrm>
+            <a:off x="10062541" y="2148839"/>
+            <a:ext cx="1371600" cy="239395"/>
+          </a:xfrm>
+          <a:prstGeom prst="rect">
+            <a:avLst/>
+          </a:prstGeom>
+          <a:noFill/>
+          <a:effectLst/>
+        </p:spPr>
+        <p:txBody>
+          <a:bodyPr wrap="none" lIns="18288" rIns="18288" tIns="18288" bIns="18288" anchor="t">
+            <a:spAutoFit/>
+          </a:bodyPr>
+          <a:lstStyle/>
+          <a:p>
+            <a:pPr algn="l">
+              <a:spcAft>
+                <a:spcPts val="0"/>
+              </a:spcAft>
+            </a:pPr>
+            <a:r>
+              <a:rPr sz="1250" b="1" i="0">
+                <a:solidFill>
+                  <a:srgbClr val="E7F0F3"/>
+                </a:solidFill>
+                <a:latin typeface="Arial"/>
+              </a:rPr>
+              <a:t>10000 nJ</a:t>
+            </a:r>
+          </a:p>
+        </p:txBody>
+      </p:sp>
+      <p:sp>
+        <p:nvSpPr>
+          <p:cNvPr id="10" name="C3-E29 text 8" descr="sci-ppt:o008"/>
+          <p:cNvSpPr txBox="1"/>
+          <p:nvPr/>
+        </p:nvSpPr>
+        <p:spPr>
+          <a:xfrm>
+            <a:off x="457200" y="2761488"/>
+            <a:ext cx="5029200" cy="239395"/>
+          </a:xfrm>
+          <a:prstGeom prst="rect">
+            <a:avLst/>
+          </a:prstGeom>
+          <a:noFill/>
+          <a:effectLst/>
+        </p:spPr>
+        <p:txBody>
+          <a:bodyPr wrap="none" lIns="18288" rIns="18288" tIns="18288" bIns="18288" anchor="t">
+            <a:spAutoFit/>
+          </a:bodyPr>
+          <a:lstStyle/>
+          <a:p>
+            <a:pPr algn="l">
+              <a:spcAft>
+                <a:spcPts val="0"/>
+              </a:spcAft>
+            </a:pPr>
+            <a:r>
+              <a:rPr sz="1250" b="0" i="0">
+                <a:solidFill>
+                  <a:srgbClr val="E7F0F3"/>
+                </a:solidFill>
+                <a:latin typeface="Arial"/>
+              </a:rPr>
+              <a:t>per site E_abs,site = E_abs,tot / 25</a:t>
+            </a:r>
+          </a:p>
+        </p:txBody>
+      </p:sp>
+      <p:sp>
+        <p:nvSpPr>
+          <p:cNvPr id="11" name="C3-E29 rect 9" descr="sci-ppt:o009"/>
+          <p:cNvSpPr/>
+          <p:nvPr/>
+        </p:nvSpPr>
+        <p:spPr>
+          <a:xfrm>
+            <a:off x="5577840" y="2743200"/>
+            <a:ext cx="2869778" cy="411480"/>
+          </a:xfrm>
+          <a:prstGeom prst="rect">
+            <a:avLst/>
+          </a:prstGeom>
+          <a:solidFill>
+            <a:srgbClr val="F2B880">
+              <a:alpha val="85000"/>
+            </a:srgbClr>
+          </a:solidFill>
+          <a:ln w="12700">
+            <a:solidFill>
+              <a:srgbClr val="F2B880">
+                <a:alpha val="85000"/>
+              </a:srgbClr>
+            </a:solidFill>
+          </a:ln>
+          <a:effectLst/>
+        </p:spPr>
+        <p:txBody>
+          <a:bodyPr rtlCol="0" anchor="ctr"/>
+          <a:lstStyle/>
+          <a:p>
+            <a:pPr algn="ctr"/>
+          </a:p>
+        </p:txBody>
+      </p:sp>
+      <p:sp>
+        <p:nvSpPr>
+          <p:cNvPr id="12" name="C3-E29 text 10" descr="sci-ppt:o010"/>
+          <p:cNvSpPr txBox="1"/>
+          <p:nvPr/>
+        </p:nvSpPr>
+        <p:spPr>
+          <a:xfrm>
+            <a:off x="8520770" y="2788920"/>
+            <a:ext cx="1371600" cy="239395"/>
+          </a:xfrm>
+          <a:prstGeom prst="rect">
+            <a:avLst/>
+          </a:prstGeom>
+          <a:noFill/>
+          <a:effectLst/>
+        </p:spPr>
+        <p:txBody>
+          <a:bodyPr wrap="none" lIns="18288" rIns="18288" tIns="18288" bIns="18288" anchor="t">
+            <a:spAutoFit/>
+          </a:bodyPr>
+          <a:lstStyle/>
+          <a:p>
+            <a:pPr algn="l">
+              <a:spcAft>
+                <a:spcPts val="0"/>
+              </a:spcAft>
+            </a:pPr>
+            <a:r>
+              <a:rPr sz="1250" b="1" i="0">
+                <a:solidFill>
+                  <a:srgbClr val="E7F0F3"/>
+                </a:solidFill>
+                <a:latin typeface="Arial"/>
+              </a:rPr>
+              <a:t>400 nJ</a:t>
+            </a:r>
+          </a:p>
+        </p:txBody>
+      </p:sp>
+      <p:sp>
+        <p:nvSpPr>
+          <p:cNvPr id="13" name="C3-E29 text 11" descr="sci-ppt:o011"/>
+          <p:cNvSpPr txBox="1"/>
+          <p:nvPr/>
+        </p:nvSpPr>
+        <p:spPr>
+          <a:xfrm>
+            <a:off x="457200" y="3401568"/>
+            <a:ext cx="5029200" cy="239395"/>
+          </a:xfrm>
+          <a:prstGeom prst="rect">
+            <a:avLst/>
+          </a:prstGeom>
+          <a:noFill/>
+          <a:effectLst/>
+        </p:spPr>
+        <p:txBody>
+          <a:bodyPr wrap="none" lIns="18288" rIns="18288" tIns="18288" bIns="18288" anchor="t">
+            <a:spAutoFit/>
+          </a:bodyPr>
+          <a:lstStyle/>
+          <a:p>
+            <a:pPr algn="l">
+              <a:spcAft>
+                <a:spcPts val="0"/>
+              </a:spcAft>
+            </a:pPr>
+            <a:r>
+              <a:rPr sz="1250" b="0" i="0">
+                <a:solidFill>
+                  <a:srgbClr val="E7F0F3"/>
+                </a:solidFill>
+                <a:latin typeface="Arial"/>
+              </a:rPr>
+              <a:t>to PFC by deadline f_T E_abs,site (f_T = 0.40)</a:t>
+            </a:r>
+          </a:p>
+        </p:txBody>
+      </p:sp>
+      <p:sp>
+        <p:nvSpPr>
+          <p:cNvPr id="14" name="C3-E29 rect 12" descr="sci-ppt:o012"/>
+          <p:cNvSpPr/>
+          <p:nvPr/>
+        </p:nvSpPr>
+        <p:spPr>
+          <a:xfrm>
+            <a:off x="5577840" y="3383279"/>
+            <a:ext cx="2430895" cy="411480"/>
+          </a:xfrm>
+          <a:prstGeom prst="rect">
+            <a:avLst/>
+          </a:prstGeom>
+          <a:solidFill>
+            <a:srgbClr val="F28BA0">
+              <a:alpha val="85000"/>
+            </a:srgbClr>
+          </a:solidFill>
+          <a:ln w="12700">
+            <a:solidFill>
+              <a:srgbClr val="F28BA0">
+                <a:alpha val="85000"/>
+              </a:srgbClr>
+            </a:solidFill>
+          </a:ln>
+          <a:effectLst/>
+        </p:spPr>
+        <p:txBody>
+          <a:bodyPr rtlCol="0" anchor="ctr"/>
+          <a:lstStyle/>
+          <a:p>
+            <a:pPr algn="ctr"/>
+          </a:p>
+        </p:txBody>
+      </p:sp>
+      <p:sp>
+        <p:nvSpPr>
+          <p:cNvPr id="15" name="C3-E29 text 13" descr="sci-ppt:o013"/>
+          <p:cNvSpPr txBox="1"/>
+          <p:nvPr/>
+        </p:nvSpPr>
+        <p:spPr>
+          <a:xfrm>
+            <a:off x="8081887" y="3428999"/>
+            <a:ext cx="1371600" cy="239395"/>
+          </a:xfrm>
+          <a:prstGeom prst="rect">
+            <a:avLst/>
+          </a:prstGeom>
+          <a:noFill/>
+          <a:effectLst/>
+        </p:spPr>
+        <p:txBody>
+          <a:bodyPr wrap="none" lIns="18288" rIns="18288" tIns="18288" bIns="18288" anchor="t">
+            <a:spAutoFit/>
+          </a:bodyPr>
+          <a:lstStyle/>
+          <a:p>
+            <a:pPr algn="l">
+              <a:spcAft>
+                <a:spcPts val="0"/>
+              </a:spcAft>
+            </a:pPr>
+            <a:r>
+              <a:rPr sz="1250" b="1" i="0">
+                <a:solidFill>
+                  <a:srgbClr val="E7F0F3"/>
+                </a:solidFill>
+                <a:latin typeface="Arial"/>
+              </a:rPr>
+              <a:t>160 nJ</a:t>
+            </a:r>
+          </a:p>
+        </p:txBody>
+      </p:sp>
+      <p:sp>
+        <p:nvSpPr>
+          <p:cNvPr id="16" name="C3-E29 text 14" descr="sci-ppt:o014"/>
+          <p:cNvSpPr txBox="1"/>
+          <p:nvPr/>
+        </p:nvSpPr>
+        <p:spPr>
+          <a:xfrm>
+            <a:off x="457200" y="4041648"/>
+            <a:ext cx="5029200" cy="239395"/>
+          </a:xfrm>
+          <a:prstGeom prst="rect">
+            <a:avLst/>
+          </a:prstGeom>
+          <a:noFill/>
+          <a:effectLst/>
+        </p:spPr>
+        <p:txBody>
+          <a:bodyPr wrap="none" lIns="18288" rIns="18288" tIns="18288" bIns="18288" anchor="t">
+            <a:spAutoFit/>
+          </a:bodyPr>
+          <a:lstStyle/>
+          <a:p>
+            <a:pPr algn="l">
+              <a:spcAft>
+                <a:spcPts val="0"/>
+              </a:spcAft>
+            </a:pPr>
+            <a:r>
+              <a:rPr sz="1250" b="0" i="0">
+                <a:solidFill>
+                  <a:srgbClr val="E7F0F3"/>
+                </a:solidFill>
+                <a:latin typeface="Arial"/>
+              </a:rPr>
+              <a:t>jet kinetic energy Eⱼ = ηⱼ E_abs,site</a:t>
+            </a:r>
+          </a:p>
+        </p:txBody>
+      </p:sp>
+      <p:sp>
+        <p:nvSpPr>
+          <p:cNvPr id="17" name="C3-E29 rect 15" descr="sci-ppt:o015"/>
+          <p:cNvSpPr/>
+          <p:nvPr/>
+        </p:nvSpPr>
+        <p:spPr>
+          <a:xfrm>
+            <a:off x="5577840" y="4023360"/>
+            <a:ext cx="332002" cy="411480"/>
+          </a:xfrm>
+          <a:prstGeom prst="rect">
+            <a:avLst/>
+          </a:prstGeom>
+          <a:solidFill>
+            <a:srgbClr val="A8E6A1">
+              <a:alpha val="85000"/>
+            </a:srgbClr>
+          </a:solidFill>
+          <a:ln w="12700">
+            <a:solidFill>
+              <a:srgbClr val="A8E6A1">
+                <a:alpha val="85000"/>
+              </a:srgbClr>
+            </a:solidFill>
+          </a:ln>
+          <a:effectLst/>
+        </p:spPr>
+        <p:txBody>
+          <a:bodyPr rtlCol="0" anchor="ctr"/>
+          <a:lstStyle/>
+          <a:p>
+            <a:pPr algn="ctr"/>
+          </a:p>
+        </p:txBody>
+      </p:sp>
+      <p:sp>
+        <p:nvSpPr>
+          <p:cNvPr id="18" name="C3-E29 text 16" descr="sci-ppt:o016"/>
+          <p:cNvSpPr txBox="1"/>
+          <p:nvPr/>
+        </p:nvSpPr>
+        <p:spPr>
+          <a:xfrm>
+            <a:off x="5982994" y="4069080"/>
+            <a:ext cx="1371600" cy="239395"/>
+          </a:xfrm>
+          <a:prstGeom prst="rect">
+            <a:avLst/>
+          </a:prstGeom>
+          <a:noFill/>
+          <a:effectLst/>
+        </p:spPr>
+        <p:txBody>
+          <a:bodyPr wrap="none" lIns="18288" rIns="18288" tIns="18288" bIns="18288" anchor="t">
+            <a:spAutoFit/>
+          </a:bodyPr>
+          <a:lstStyle/>
+          <a:p>
+            <a:pPr algn="l">
+              <a:spcAft>
+                <a:spcPts val="0"/>
+              </a:spcAft>
+            </a:pPr>
+            <a:r>
+              <a:rPr sz="1250" b="1" i="0">
+                <a:solidFill>
+                  <a:srgbClr val="E7F0F3"/>
+                </a:solidFill>
+                <a:latin typeface="Arial"/>
+              </a:rPr>
+              <a:t>2 nJ</a:t>
+            </a:r>
+          </a:p>
+        </p:txBody>
+      </p:sp>
+      <p:sp>
+        <p:nvSpPr>
+          <p:cNvPr id="19" name="C3-E29 round_rect 17" descr="sci-ppt:o017"/>
+          <p:cNvSpPr/>
+          <p:nvPr/>
+        </p:nvSpPr>
+        <p:spPr>
+          <a:xfrm>
+            <a:off x="457200" y="4480560"/>
+            <a:ext cx="5486400" cy="1325880"/>
+          </a:xfrm>
+          <a:prstGeom prst="roundRect">
             <a:avLst/>
           </a:prstGeom>
           <a:solidFill>
             <a:srgbClr val="213E4B"/>
           </a:solidFill>
-          <a:ln w="19050">
+          <a:ln w="20320">
             <a:solidFill>
               <a:srgbClr val="B4C7D2"/>
             </a:solidFill>
@@ -3170,14 +3790,14 @@
       </p:sp>
       <p:sp>
         <p:nvSpPr>
-          <p:cNvPr id="4" name="C3-E29 text 2" descr="sci-ppt:o002"/>
+          <p:cNvPr id="20" name="C3-E29 text 18" descr="sci-ppt:o018"/>
           <p:cNvSpPr txBox="1"/>
           <p:nvPr/>
         </p:nvSpPr>
         <p:spPr>
           <a:xfrm>
-            <a:off x="758952" y="1627632"/>
-            <a:ext cx="2871216" cy="914400"/>
+            <a:off x="594360" y="4572000"/>
+            <a:ext cx="5212080" cy="433070"/>
           </a:xfrm>
           <a:prstGeom prst="rect">
             <a:avLst/>
@@ -3186,7 +3806,7 @@
           <a:effectLst/>
         </p:spPr>
         <p:txBody>
-          <a:bodyPr wrap="square" lIns="27432" rIns="27432" tIns="18288" bIns="18288" anchor="ctr">
+          <a:bodyPr wrap="none" lIns="18288" rIns="18288" tIns="18288" bIns="18288" anchor="t">
             <a:spAutoFit/>
           </a:bodyPr>
           <a:lstStyle/>
@@ -3197,61 +3817,93 @@
               </a:spcAft>
             </a:pPr>
             <a:r>
-              <a:rPr sz="1800" b="0" i="0">
+              <a:rPr sz="1250" b="0" i="0">
                 <a:solidFill>
                   <a:srgbClr val="E7F0F3"/>
                 </a:solidFill>
                 <a:latin typeface="Arial"/>
               </a:rPr>
-              <a:t>E_L = 25 μJ</a:t>
-            </a:r>
-          </a:p>
-        </p:txBody>
-      </p:sp>
-      <p:cxnSp>
-        <p:nvCxnSpPr>
-          <p:cNvPr id="5" name="C3-E29 arrow 3" descr="sci-ppt:o003"/>
-          <p:cNvCxnSpPr/>
+              <a:t>Efficiencies are stipulated: f_geo = 0.8, A_λ = 0.5, f_T =</a:t>
+            </a:r>
+          </a:p>
+          <a:p>
+            <a:pPr algn="l">
+              <a:spcAft>
+                <a:spcPts val="0"/>
+              </a:spcAft>
+            </a:pPr>
+            <a:r>
+              <a:rPr sz="1250" b="0" i="0">
+                <a:solidFill>
+                  <a:srgbClr val="E7F0F3"/>
+                </a:solidFill>
+                <a:latin typeface="Arial"/>
+              </a:rPr>
+              <a:t>0.40, ηⱼ = 0.005.</a:t>
+            </a:r>
+          </a:p>
+        </p:txBody>
+      </p:sp>
+      <p:sp>
+        <p:nvSpPr>
+          <p:cNvPr id="21" name="C3-E29 text 19" descr="sci-ppt:o019"/>
+          <p:cNvSpPr txBox="1"/>
           <p:nvPr/>
-        </p:nvCxnSpPr>
-        <p:spPr>
-          <a:xfrm>
-            <a:off x="3794760" y="2057400"/>
-            <a:ext cx="640080" cy="0"/>
-          </a:xfrm>
-          <a:prstGeom prst="line">
+        </p:nvSpPr>
+        <p:spPr>
+          <a:xfrm>
+            <a:off x="594360" y="5074920"/>
+            <a:ext cx="5212080" cy="239395"/>
+          </a:xfrm>
+          <a:prstGeom prst="rect">
             <a:avLst/>
           </a:prstGeom>
-          <a:ln w="25400">
-            <a:solidFill>
-              <a:srgbClr val="8EDBD4"/>
-            </a:solidFill>
-            <a:headEnd type="none" w="med" len="med"/>
-            <a:tailEnd type="triangle" w="med" len="med"/>
-          </a:ln>
+          <a:noFill/>
           <a:effectLst/>
         </p:spPr>
-      </p:cxnSp>
-      <p:sp>
-        <p:nvSpPr>
-          <p:cNvPr id="6" name="C3-E29 rect 4" descr="sci-ppt:o004"/>
+        <p:txBody>
+          <a:bodyPr wrap="none" lIns="18288" rIns="18288" tIns="18288" bIns="18288" anchor="t">
+            <a:spAutoFit/>
+          </a:bodyPr>
+          <a:lstStyle/>
+          <a:p>
+            <a:pPr algn="l">
+              <a:spcAft>
+                <a:spcPts val="0"/>
+              </a:spcAft>
+            </a:pPr>
+            <a:r>
+              <a:rPr sz="1250" b="0" i="0">
+                <a:solidFill>
+                  <a:srgbClr val="B4C7D2"/>
+                </a:solidFill>
+                <a:latin typeface="Arial"/>
+              </a:rPr>
+              <a:t>N_d = 25 sites share the energy equally.</a:t>
+            </a:r>
+          </a:p>
+        </p:txBody>
+      </p:sp>
+      <p:sp>
+        <p:nvSpPr>
+          <p:cNvPr id="22" name="C3-E29 round_rect 20" descr="sci-ppt:o020"/>
           <p:cNvSpPr/>
           <p:nvPr/>
         </p:nvSpPr>
         <p:spPr>
           <a:xfrm>
-            <a:off x="4480560" y="1417320"/>
-            <a:ext cx="3200400" cy="1325880"/>
-          </a:xfrm>
-          <a:prstGeom prst="rect">
+            <a:off x="6126480" y="4480560"/>
+            <a:ext cx="5669280" cy="1325880"/>
+          </a:xfrm>
+          <a:prstGeom prst="roundRect">
             <a:avLst/>
           </a:prstGeom>
           <a:solidFill>
             <a:srgbClr val="213E4B"/>
           </a:solidFill>
-          <a:ln w="19050">
+          <a:ln w="20320">
             <a:solidFill>
-              <a:srgbClr val="B4C7D2"/>
+              <a:srgbClr val="F2B880"/>
             </a:solidFill>
           </a:ln>
           <a:effectLst/>
@@ -3266,14 +3918,14 @@
       </p:sp>
       <p:sp>
         <p:nvSpPr>
-          <p:cNvPr id="7" name="C3-E29 text 5" descr="sci-ppt:o005"/>
+          <p:cNvPr id="23" name="C3-E29 text 21" descr="sci-ppt:o021"/>
           <p:cNvSpPr txBox="1"/>
           <p:nvPr/>
         </p:nvSpPr>
         <p:spPr>
           <a:xfrm>
-            <a:off x="4645152" y="1627632"/>
-            <a:ext cx="2871216" cy="914400"/>
+            <a:off x="6236208" y="4535424"/>
+            <a:ext cx="5449824" cy="247142"/>
           </a:xfrm>
           <a:prstGeom prst="rect">
             <a:avLst/>
@@ -3282,7 +3934,7 @@
           <a:effectLst/>
         </p:spPr>
         <p:txBody>
-          <a:bodyPr wrap="square" lIns="27432" rIns="27432" tIns="18288" bIns="18288" anchor="ctr">
+          <a:bodyPr wrap="none" lIns="18288" rIns="18288" tIns="18288" bIns="18288" anchor="t">
             <a:spAutoFit/>
           </a:bodyPr>
           <a:lstStyle/>
@@ -3293,83 +3945,27 @@
               </a:spcAft>
             </a:pPr>
             <a:r>
-              <a:rPr sz="1800" b="0" i="0">
+              <a:rPr sz="1300" b="1" i="0">
                 <a:solidFill>
-                  <a:srgbClr val="E7F0F3"/>
+                  <a:srgbClr val="F2B880"/>
                 </a:solidFill>
                 <a:latin typeface="Arial"/>
               </a:rPr>
-              <a:t>E_abs,total = 10 μJ</a:t>
-            </a:r>
-          </a:p>
-        </p:txBody>
-      </p:sp>
-      <p:cxnSp>
-        <p:nvCxnSpPr>
-          <p:cNvPr id="8" name="C3-E29 arrow 6" descr="sci-ppt:o006"/>
-          <p:cNvCxnSpPr/>
-          <p:nvPr/>
-        </p:nvCxnSpPr>
-        <p:spPr>
-          <a:xfrm>
-            <a:off x="7680960" y="2057400"/>
-            <a:ext cx="640080" cy="0"/>
-          </a:xfrm>
-          <a:prstGeom prst="line">
-            <a:avLst/>
-          </a:prstGeom>
-          <a:ln w="25400">
-            <a:solidFill>
-              <a:srgbClr val="8EDBD4"/>
-            </a:solidFill>
-            <a:headEnd type="none" w="med" len="med"/>
-            <a:tailEnd type="triangle" w="med" len="med"/>
-          </a:ln>
-          <a:effectLst/>
-        </p:spPr>
-      </p:cxnSp>
-      <p:sp>
-        <p:nvSpPr>
-          <p:cNvPr id="9" name="C3-E29 rect 7" descr="sci-ppt:o007"/>
-          <p:cNvSpPr/>
-          <p:nvPr/>
-        </p:nvSpPr>
-        <p:spPr>
-          <a:xfrm>
-            <a:off x="8366760" y="1417320"/>
-            <a:ext cx="3200400" cy="1325880"/>
-          </a:xfrm>
-          <a:prstGeom prst="rect">
-            <a:avLst/>
-          </a:prstGeom>
-          <a:solidFill>
-            <a:srgbClr val="213E4B"/>
-          </a:solidFill>
-          <a:ln w="19050">
-            <a:solidFill>
-              <a:srgbClr val="B4C7D2"/>
-            </a:solidFill>
-          </a:ln>
-          <a:effectLst/>
-        </p:spPr>
-        <p:txBody>
-          <a:bodyPr rtlCol="0" anchor="ctr"/>
-          <a:lstStyle/>
-          <a:p>
-            <a:pPr algn="ctr"/>
-          </a:p>
-        </p:txBody>
-      </p:sp>
-      <p:sp>
-        <p:nvSpPr>
-          <p:cNvPr id="10" name="C3-E29 text 8" descr="sci-ppt:o008"/>
+              <a:t>Total jet energy</a:t>
+            </a:r>
+          </a:p>
+        </p:txBody>
+      </p:sp>
+      <p:sp>
+        <p:nvSpPr>
+          <p:cNvPr id="24" name="C3-E29 text 22" descr="sci-ppt:o022"/>
           <p:cNvSpPr txBox="1"/>
           <p:nvPr/>
         </p:nvSpPr>
         <p:spPr>
           <a:xfrm>
-            <a:off x="8531352" y="1627632"/>
-            <a:ext cx="2871216" cy="914400"/>
+            <a:off x="6263640" y="4937760"/>
+            <a:ext cx="5394960" cy="262636"/>
           </a:xfrm>
           <a:prstGeom prst="rect">
             <a:avLst/>
@@ -3378,7 +3974,7 @@
           <a:effectLst/>
         </p:spPr>
         <p:txBody>
-          <a:bodyPr wrap="square" lIns="27432" rIns="27432" tIns="18288" bIns="18288" anchor="ctr">
+          <a:bodyPr wrap="none" lIns="18288" rIns="18288" tIns="18288" bIns="18288" anchor="t">
             <a:spAutoFit/>
           </a:bodyPr>
           <a:lstStyle/>
@@ -3389,27 +3985,27 @@
               </a:spcAft>
             </a:pPr>
             <a:r>
-              <a:rPr sz="1800" b="0" i="0">
+              <a:rPr sz="1400" b="1" i="0">
                 <a:solidFill>
-                  <a:srgbClr val="E7F0F3"/>
+                  <a:srgbClr val="F2B880"/>
                 </a:solidFill>
                 <a:latin typeface="Arial"/>
               </a:rPr>
-              <a:t>E_j,total = 50 nJ</a:t>
-            </a:r>
-          </a:p>
-        </p:txBody>
-      </p:sp>
-      <p:sp>
-        <p:nvSpPr>
-          <p:cNvPr id="11" name="C3-E29 text 9" descr="sci-ppt:o009"/>
+              <a:t>Eⱼ,tot = N_d Eⱼ = 25 × 2.00 nJ = 50.0 nJ</a:t>
+            </a:r>
+          </a:p>
+        </p:txBody>
+      </p:sp>
+      <p:sp>
+        <p:nvSpPr>
+          <p:cNvPr id="25" name="C3-E29 text 23" descr="sci-ppt:o023"/>
           <p:cNvSpPr txBox="1"/>
           <p:nvPr/>
         </p:nvSpPr>
         <p:spPr>
           <a:xfrm>
-            <a:off x="731520" y="3246120"/>
-            <a:ext cx="10789920" cy="457200"/>
+            <a:off x="320040" y="6510528"/>
+            <a:ext cx="11521440" cy="200660"/>
           </a:xfrm>
           <a:prstGeom prst="rect">
             <a:avLst/>
@@ -3418,469 +4014,7 @@
           <a:effectLst/>
         </p:spPr>
         <p:txBody>
-          <a:bodyPr wrap="square" lIns="27432" rIns="27432" tIns="18288" bIns="18288" anchor="ctr">
-            <a:spAutoFit/>
-          </a:bodyPr>
-          <a:lstStyle/>
-          <a:p>
-            <a:pPr algn="l">
-              <a:spcAft>
-                <a:spcPts val="0"/>
-              </a:spcAft>
-            </a:pPr>
-            <a:r>
-              <a:rPr sz="1800" b="0" i="0">
-                <a:solidFill>
-                  <a:srgbClr val="8EDBD4"/>
-                </a:solidFill>
-                <a:latin typeface="Arial"/>
-              </a:rPr>
-              <a:t>Each energy allocation belongs to the same finite source budget.</a:t>
-            </a:r>
-          </a:p>
-        </p:txBody>
-      </p:sp>
-      <p:cxnSp>
-        <p:nvCxnSpPr>
-          <p:cNvPr id="12" name="C3-E29 line 10" descr="sci-ppt:o010"/>
-          <p:cNvCxnSpPr/>
-          <p:nvPr/>
-        </p:nvCxnSpPr>
-        <p:spPr>
-          <a:xfrm>
-            <a:off x="274320" y="3977639"/>
-            <a:ext cx="11612880" cy="0"/>
-          </a:xfrm>
-          <a:prstGeom prst="line">
-            <a:avLst/>
-          </a:prstGeom>
-          <a:ln w="12700">
-            <a:solidFill>
-              <a:srgbClr val="405967"/>
-            </a:solidFill>
-          </a:ln>
-          <a:effectLst/>
-        </p:spPr>
-      </p:cxnSp>
-      <p:sp>
-        <p:nvSpPr>
-          <p:cNvPr id="13" name="C3-E29 text 11" descr="sci-ppt:o011"/>
-          <p:cNvSpPr txBox="1"/>
-          <p:nvPr/>
-        </p:nvSpPr>
-        <p:spPr>
-          <a:xfrm>
-            <a:off x="320040" y="4096512"/>
-            <a:ext cx="5715000" cy="246888"/>
-          </a:xfrm>
-          <a:prstGeom prst="rect">
-            <a:avLst/>
-          </a:prstGeom>
-          <a:noFill/>
-          <a:effectLst/>
-        </p:spPr>
-        <p:txBody>
-          <a:bodyPr wrap="square" lIns="27432" rIns="27432" tIns="18288" bIns="18288" anchor="ctr">
-            <a:spAutoFit/>
-          </a:bodyPr>
-          <a:lstStyle/>
-          <a:p>
-            <a:pPr algn="l">
-              <a:spcAft>
-                <a:spcPts val="0"/>
-              </a:spcAft>
-            </a:pPr>
-            <a:r>
-              <a:rPr sz="1150" b="0" i="0">
-                <a:solidFill>
-                  <a:srgbClr val="B4C7D2"/>
-                </a:solidFill>
-                <a:latin typeface="Arial"/>
-              </a:rPr>
-              <a:t>• E_L = 25 μJ incoming</a:t>
-            </a:r>
-          </a:p>
-        </p:txBody>
-      </p:sp>
-      <p:sp>
-        <p:nvSpPr>
-          <p:cNvPr id="14" name="C3-E29 text 12" descr="sci-ppt:o012"/>
-          <p:cNvSpPr txBox="1"/>
-          <p:nvPr/>
-        </p:nvSpPr>
-        <p:spPr>
-          <a:xfrm>
-            <a:off x="6217920" y="4096512"/>
-            <a:ext cx="5715000" cy="246888"/>
-          </a:xfrm>
-          <a:prstGeom prst="rect">
-            <a:avLst/>
-          </a:prstGeom>
-          <a:noFill/>
-          <a:effectLst/>
-        </p:spPr>
-        <p:txBody>
-          <a:bodyPr wrap="square" lIns="27432" rIns="27432" tIns="18288" bIns="18288" anchor="ctr">
-            <a:spAutoFit/>
-          </a:bodyPr>
-          <a:lstStyle/>
-          <a:p>
-            <a:pPr algn="l">
-              <a:spcAft>
-                <a:spcPts val="0"/>
-              </a:spcAft>
-            </a:pPr>
-            <a:r>
-              <a:rPr sz="1150" b="0" i="0">
-                <a:solidFill>
-                  <a:srgbClr val="B4C7D2"/>
-                </a:solidFill>
-                <a:latin typeface="Arial"/>
-              </a:rPr>
-              <a:t>• f_geo = 0.8 intercepted</a:t>
-            </a:r>
-          </a:p>
-        </p:txBody>
-      </p:sp>
-      <p:sp>
-        <p:nvSpPr>
-          <p:cNvPr id="15" name="C3-E29 text 13" descr="sci-ppt:o013"/>
-          <p:cNvSpPr txBox="1"/>
-          <p:nvPr/>
-        </p:nvSpPr>
-        <p:spPr>
-          <a:xfrm>
-            <a:off x="320040" y="4329684"/>
-            <a:ext cx="5715000" cy="246888"/>
-          </a:xfrm>
-          <a:prstGeom prst="rect">
-            <a:avLst/>
-          </a:prstGeom>
-          <a:noFill/>
-          <a:effectLst/>
-        </p:spPr>
-        <p:txBody>
-          <a:bodyPr wrap="square" lIns="27432" rIns="27432" tIns="18288" bIns="18288" anchor="ctr">
-            <a:spAutoFit/>
-          </a:bodyPr>
-          <a:lstStyle/>
-          <a:p>
-            <a:pPr algn="l">
-              <a:spcAft>
-                <a:spcPts val="0"/>
-              </a:spcAft>
-            </a:pPr>
-            <a:r>
-              <a:rPr sz="1150" b="0" i="0">
-                <a:solidFill>
-                  <a:srgbClr val="B4C7D2"/>
-                </a:solidFill>
-                <a:latin typeface="Arial"/>
-              </a:rPr>
-              <a:t>• A_λ = 0.5 absorbed; λ wavelength</a:t>
-            </a:r>
-          </a:p>
-        </p:txBody>
-      </p:sp>
-      <p:sp>
-        <p:nvSpPr>
-          <p:cNvPr id="16" name="C3-E29 text 14" descr="sci-ppt:o014"/>
-          <p:cNvSpPr txBox="1"/>
-          <p:nvPr/>
-        </p:nvSpPr>
-        <p:spPr>
-          <a:xfrm>
-            <a:off x="6217920" y="4329684"/>
-            <a:ext cx="5715000" cy="246888"/>
-          </a:xfrm>
-          <a:prstGeom prst="rect">
-            <a:avLst/>
-          </a:prstGeom>
-          <a:noFill/>
-          <a:effectLst/>
-        </p:spPr>
-        <p:txBody>
-          <a:bodyPr wrap="square" lIns="27432" rIns="27432" tIns="18288" bIns="18288" anchor="ctr">
-            <a:spAutoFit/>
-          </a:bodyPr>
-          <a:lstStyle/>
-          <a:p>
-            <a:pPr algn="l">
-              <a:spcAft>
-                <a:spcPts val="0"/>
-              </a:spcAft>
-            </a:pPr>
-            <a:r>
-              <a:rPr sz="1150" b="0" i="0">
-                <a:solidFill>
-                  <a:srgbClr val="B4C7D2"/>
-                </a:solidFill>
-                <a:latin typeface="Arial"/>
-              </a:rPr>
-              <a:t>• N_d = 25 sites</a:t>
-            </a:r>
-          </a:p>
-        </p:txBody>
-      </p:sp>
-      <p:sp>
-        <p:nvSpPr>
-          <p:cNvPr id="17" name="C3-E29 text 15" descr="sci-ppt:o015"/>
-          <p:cNvSpPr txBox="1"/>
-          <p:nvPr/>
-        </p:nvSpPr>
-        <p:spPr>
-          <a:xfrm>
-            <a:off x="320040" y="4562856"/>
-            <a:ext cx="5715000" cy="246888"/>
-          </a:xfrm>
-          <a:prstGeom prst="rect">
-            <a:avLst/>
-          </a:prstGeom>
-          <a:noFill/>
-          <a:effectLst/>
-        </p:spPr>
-        <p:txBody>
-          <a:bodyPr wrap="square" lIns="27432" rIns="27432" tIns="18288" bIns="18288" anchor="ctr">
-            <a:spAutoFit/>
-          </a:bodyPr>
-          <a:lstStyle/>
-          <a:p>
-            <a:pPr algn="l">
-              <a:spcAft>
-                <a:spcPts val="0"/>
-              </a:spcAft>
-            </a:pPr>
-            <a:r>
-              <a:rPr sz="1150" b="0" i="0">
-                <a:solidFill>
-                  <a:srgbClr val="B4C7D2"/>
-                </a:solidFill>
-                <a:latin typeface="Arial"/>
-              </a:rPr>
-              <a:t>• E_abs,tot = 10 μJ</a:t>
-            </a:r>
-          </a:p>
-        </p:txBody>
-      </p:sp>
-      <p:sp>
-        <p:nvSpPr>
-          <p:cNvPr id="18" name="C3-E29 text 16" descr="sci-ppt:o016"/>
-          <p:cNvSpPr txBox="1"/>
-          <p:nvPr/>
-        </p:nvSpPr>
-        <p:spPr>
-          <a:xfrm>
-            <a:off x="6217920" y="4562856"/>
-            <a:ext cx="5715000" cy="246888"/>
-          </a:xfrm>
-          <a:prstGeom prst="rect">
-            <a:avLst/>
-          </a:prstGeom>
-          <a:noFill/>
-          <a:effectLst/>
-        </p:spPr>
-        <p:txBody>
-          <a:bodyPr wrap="square" lIns="27432" rIns="27432" tIns="18288" bIns="18288" anchor="ctr">
-            <a:spAutoFit/>
-          </a:bodyPr>
-          <a:lstStyle/>
-          <a:p>
-            <a:pPr algn="l">
-              <a:spcAft>
-                <a:spcPts val="0"/>
-              </a:spcAft>
-            </a:pPr>
-            <a:r>
-              <a:rPr sz="1150" b="0" i="0">
-                <a:solidFill>
-                  <a:srgbClr val="B4C7D2"/>
-                </a:solidFill>
-                <a:latin typeface="Arial"/>
-              </a:rPr>
-              <a:t>• E_abs,site = 400 nJ</a:t>
-            </a:r>
-          </a:p>
-        </p:txBody>
-      </p:sp>
-      <p:sp>
-        <p:nvSpPr>
-          <p:cNvPr id="19" name="C3-E29 text 17" descr="sci-ppt:o017"/>
-          <p:cNvSpPr txBox="1"/>
-          <p:nvPr/>
-        </p:nvSpPr>
-        <p:spPr>
-          <a:xfrm>
-            <a:off x="320040" y="4796028"/>
-            <a:ext cx="5715000" cy="246888"/>
-          </a:xfrm>
-          <a:prstGeom prst="rect">
-            <a:avLst/>
-          </a:prstGeom>
-          <a:noFill/>
-          <a:effectLst/>
-        </p:spPr>
-        <p:txBody>
-          <a:bodyPr wrap="square" lIns="27432" rIns="27432" tIns="18288" bIns="18288" anchor="ctr">
-            <a:spAutoFit/>
-          </a:bodyPr>
-          <a:lstStyle/>
-          <a:p>
-            <a:pPr algn="l">
-              <a:spcAft>
-                <a:spcPts val="0"/>
-              </a:spcAft>
-            </a:pPr>
-            <a:r>
-              <a:rPr sz="1150" b="0" i="0">
-                <a:solidFill>
-                  <a:srgbClr val="B4C7D2"/>
-                </a:solidFill>
-                <a:latin typeface="Arial"/>
-              </a:rPr>
-              <a:t>• f_T = 0.40 → E_PFC,deadline</a:t>
-            </a:r>
-          </a:p>
-        </p:txBody>
-      </p:sp>
-      <p:sp>
-        <p:nvSpPr>
-          <p:cNvPr id="20" name="C3-E29 text 18" descr="sci-ppt:o018"/>
-          <p:cNvSpPr txBox="1"/>
-          <p:nvPr/>
-        </p:nvSpPr>
-        <p:spPr>
-          <a:xfrm>
-            <a:off x="6217920" y="4796028"/>
-            <a:ext cx="5715000" cy="246888"/>
-          </a:xfrm>
-          <a:prstGeom prst="rect">
-            <a:avLst/>
-          </a:prstGeom>
-          <a:noFill/>
-          <a:effectLst/>
-        </p:spPr>
-        <p:txBody>
-          <a:bodyPr wrap="square" lIns="27432" rIns="27432" tIns="18288" bIns="18288" anchor="ctr">
-            <a:spAutoFit/>
-          </a:bodyPr>
-          <a:lstStyle/>
-          <a:p>
-            <a:pPr algn="l">
-              <a:spcAft>
-                <a:spcPts val="0"/>
-              </a:spcAft>
-            </a:pPr>
-            <a:r>
-              <a:rPr sz="1150" b="0" i="0">
-                <a:solidFill>
-                  <a:srgbClr val="B4C7D2"/>
-                </a:solidFill>
-                <a:latin typeface="Arial"/>
-              </a:rPr>
-              <a:t>• η_j = 0.005 → E_j, E_j,tot</a:t>
-            </a:r>
-          </a:p>
-        </p:txBody>
-      </p:sp>
-      <p:sp>
-        <p:nvSpPr>
-          <p:cNvPr id="21" name="C3-E29 text 19" descr="sci-ppt:o019"/>
-          <p:cNvSpPr txBox="1"/>
-          <p:nvPr/>
-        </p:nvSpPr>
-        <p:spPr>
-          <a:xfrm>
-            <a:off x="320040" y="5596128"/>
-            <a:ext cx="11430000" cy="292608"/>
-          </a:xfrm>
-          <a:prstGeom prst="rect">
-            <a:avLst/>
-          </a:prstGeom>
-          <a:noFill/>
-          <a:effectLst/>
-        </p:spPr>
-        <p:txBody>
-          <a:bodyPr wrap="square" lIns="27432" rIns="27432" tIns="18288" bIns="18288" anchor="ctr">
-            <a:spAutoFit/>
-          </a:bodyPr>
-          <a:lstStyle/>
-          <a:p>
-            <a:pPr algn="l">
-              <a:spcAft>
-                <a:spcPts val="0"/>
-              </a:spcAft>
-            </a:pPr>
-            <a:r>
-              <a:rPr sz="1150" b="0" i="0">
-                <a:solidFill>
-                  <a:srgbClr val="8EDBD4"/>
-                </a:solidFill>
-                <a:latin typeface="Arial"/>
-              </a:rPr>
-              <a:t>Thermal preparation is checked on its own timescale</a:t>
-            </a:r>
-          </a:p>
-        </p:txBody>
-      </p:sp>
-      <p:sp>
-        <p:nvSpPr>
-          <p:cNvPr id="22" name="C3-E29 text 20" descr="sci-ppt:o020"/>
-          <p:cNvSpPr txBox="1"/>
-          <p:nvPr/>
-        </p:nvSpPr>
-        <p:spPr>
-          <a:xfrm>
-            <a:off x="320040" y="5870448"/>
-            <a:ext cx="11430000" cy="292608"/>
-          </a:xfrm>
-          <a:prstGeom prst="rect">
-            <a:avLst/>
-          </a:prstGeom>
-          <a:noFill/>
-          <a:effectLst/>
-        </p:spPr>
-        <p:txBody>
-          <a:bodyPr wrap="square" lIns="27432" rIns="27432" tIns="18288" bIns="18288" anchor="ctr">
-            <a:spAutoFit/>
-          </a:bodyPr>
-          <a:lstStyle/>
-          <a:p>
-            <a:pPr algn="l">
-              <a:spcAft>
-                <a:spcPts val="0"/>
-              </a:spcAft>
-            </a:pPr>
-            <a:r>
-              <a:rPr sz="1150" b="0" i="0">
-                <a:solidFill>
-                  <a:srgbClr val="8EDBD4"/>
-                </a:solidFill>
-                <a:latin typeface="Arial"/>
-              </a:rPr>
-              <a:t>η_j is an assumption to be measured or solved</a:t>
-            </a:r>
-          </a:p>
-        </p:txBody>
-      </p:sp>
-      <p:sp>
-        <p:nvSpPr>
-          <p:cNvPr id="23" name="C3-E29 text 21" descr="sci-ppt:o021"/>
-          <p:cNvSpPr txBox="1"/>
-          <p:nvPr/>
-        </p:nvSpPr>
-        <p:spPr>
-          <a:xfrm>
-            <a:off x="320040" y="6473952"/>
-            <a:ext cx="11430000" cy="256032"/>
-          </a:xfrm>
-          <a:prstGeom prst="rect">
-            <a:avLst/>
-          </a:prstGeom>
-          <a:noFill/>
-          <a:effectLst/>
-        </p:spPr>
-        <p:txBody>
-          <a:bodyPr wrap="square" lIns="27432" rIns="27432" tIns="18288" bIns="18288" anchor="ctr">
+          <a:bodyPr wrap="none" lIns="18288" rIns="18288" tIns="18288" bIns="18288" anchor="t">
             <a:spAutoFit/>
           </a:bodyPr>
           <a:lstStyle/>
@@ -3897,7 +4031,7 @@
                 </a:solidFill>
                 <a:latin typeface="Arial"/>
               </a:rPr>
-              <a:t>Model schematic; geometry is not to scale.</a:t>
+              <a:t>Allocation chain of Eq. C3-E29: each stage uses only the energy left by the previous one (no double counting).</a:t>
             </a:r>
           </a:p>
         </p:txBody>
